--- a/dist/초3/수학/분수와소수/초3_수학_분수와소수_05_진분수·가분수·대분수_학생용.pptx
+++ b/dist/초3/수학/분수와소수/초3_수학_분수와소수_05_진분수·가분수·대분수_학생용.pptx
@@ -120,13 +120,13 @@
   <p:extLst>
     <p:ext uri="{521415D9-36F7-43E2-AB2F-B90AF26B5E84}">
       <p14:sectionLst xmlns:p14="http://schemas.microsoft.com/office/powerpoint/2010/main">
-        <p14:section name="도입" id="{01644810-48d7-aaba-68e9-b257158a88cd}">
+        <p14:section name="도입" id="{3a60e9fb-e91b-61b8-c439-25c31ded8722}">
           <p14:sldIdLst>
             <p14:sldId id="256"/>
             <p14:sldId id="257"/>
           </p14:sldIdLst>
         </p14:section>
-        <p14:section name="개념" id="{5b59939d-c9e7-ed01-a576-f0f08abdd1b6}">
+        <p14:section name="개념" id="{d428b192-669d-41ce-eb4f-018fcef53bff}">
           <p14:sldIdLst>
             <p14:sldId id="258"/>
             <p14:sldId id="259"/>
@@ -135,31 +135,31 @@
             <p14:sldId id="264"/>
           </p14:sldIdLst>
         </p14:section>
-        <p14:section name="연습" id="{6b800d04-366b-3a50-a225-a80109d0b1df}">
+        <p14:section name="연습" id="{4c5b49c0-1efb-1461-563c-7abdf365ecc3}">
           <p14:sldIdLst>
             <p14:sldId id="261"/>
             <p14:sldId id="262"/>
             <p14:sldId id="265"/>
           </p14:sldIdLst>
         </p14:section>
-        <p14:section name="개념" id="{bc85469e-f361-64e8-52ae-5892d382864d}">
+        <p14:section name="개념" id="{ab0944d3-d972-791d-dcbf-4e3b457d7cb0}">
           <p14:sldIdLst/>
         </p14:section>
-        <p14:section name="연습" id="{74c5bfd7-5093-f4fa-915c-b7d961493135}">
+        <p14:section name="연습" id="{af5d33dc-aac0-2312-5dcc-2897a4449a81}">
           <p14:sldIdLst/>
         </p14:section>
-        <p14:section name="확인" id="{f0240b4b-58d3-3f7a-6661-16ab9cb5682b}">
+        <p14:section name="확인" id="{5f6ca6dd-4277-15db-8419-bd1e9e2dea93}">
           <p14:sldIdLst>
             <p14:sldId id="266"/>
             <p14:sldId id="267"/>
           </p14:sldIdLst>
         </p14:section>
-        <p14:section name="정리" id="{2a71496e-88ac-47e6-aed1-7c9f8931c0df}">
+        <p14:section name="정리" id="{ed771799-f3ed-f6cd-0e55-3c9d2a39a72c}">
           <p14:sldIdLst>
             <p14:sldId id="268"/>
           </p14:sldIdLst>
         </p14:section>
-        <p14:section name="보충" id="{5813c078-0616-21d3-e24f-6eda2723e836}">
+        <p14:section name="보충" id="{51dcf9b4-ada7-46ef-e53f-a6e8169a3fc2}">
           <p14:sldIdLst>
             <p14:sldId id="269"/>
           </p14:sldIdLst>
@@ -2795,7 +2795,7 @@
               <a:buNone/>
             </a:pPr>
             <a:r>
-              <a:rPr lang="ko-KR" altLang="en-US" sz="4600" b="1" dirty="0">
+              <a:rPr lang="ko-KR" altLang="en-US" sz="4400" b="1" dirty="0">
                 <a:solidFill>
                   <a:srgbClr val="FFFFFF"/>
                 </a:solidFill>
@@ -3443,7 +3443,7 @@
         <p:spPr>
           <a:xfrm>
             <a:off x="1344168" y="2197100"/>
-            <a:ext cx="532384" cy="1092200"/>
+            <a:ext cx="541020" cy="1092200"/>
           </a:xfrm>
           <a:prstGeom prst="rect">
             <a:avLst/>
@@ -3481,7 +3481,7 @@
         </p:nvSpPr>
         <p:spPr>
           <a:xfrm>
-            <a:off x="1986280" y="2197100"/>
+            <a:off x="1994916" y="2197100"/>
             <a:ext cx="563118" cy="509524"/>
           </a:xfrm>
           <a:prstGeom prst="rect">
@@ -3520,7 +3520,7 @@
         </p:nvSpPr>
         <p:spPr>
           <a:xfrm>
-            <a:off x="2022856" y="2743200"/>
+            <a:off x="2031492" y="2743200"/>
             <a:ext cx="489966" cy="0"/>
           </a:xfrm>
           <a:prstGeom prst="line">
@@ -3543,7 +3543,7 @@
         </p:nvSpPr>
         <p:spPr>
           <a:xfrm>
-            <a:off x="1986280" y="2779776"/>
+            <a:off x="1994916" y="2779776"/>
             <a:ext cx="563118" cy="509524"/>
           </a:xfrm>
           <a:prstGeom prst="rect">
@@ -3582,7 +3582,7 @@
         </p:nvSpPr>
         <p:spPr>
           <a:xfrm>
-            <a:off x="2659126" y="2197100"/>
+            <a:off x="2667762" y="2197100"/>
             <a:ext cx="437388" cy="1092200"/>
           </a:xfrm>
           <a:prstGeom prst="rect">
@@ -3621,7 +3621,7 @@
         </p:nvSpPr>
         <p:spPr>
           <a:xfrm>
-            <a:off x="3299277" y="2263338"/>
+            <a:off x="3307913" y="2263338"/>
             <a:ext cx="377048" cy="377048"/>
           </a:xfrm>
           <a:prstGeom prst="rect">
@@ -3646,7 +3646,7 @@
         </p:nvSpPr>
         <p:spPr>
           <a:xfrm>
-            <a:off x="3242818" y="2743200"/>
+            <a:off x="3251454" y="2743200"/>
             <a:ext cx="489966" cy="0"/>
           </a:xfrm>
           <a:prstGeom prst="line">
@@ -3669,7 +3669,7 @@
         </p:nvSpPr>
         <p:spPr>
           <a:xfrm>
-            <a:off x="3206242" y="2779776"/>
+            <a:off x="3214878" y="2779776"/>
             <a:ext cx="563118" cy="509524"/>
           </a:xfrm>
           <a:prstGeom prst="rect">
@@ -3756,7 +3756,7 @@
         <p:spPr>
           <a:xfrm>
             <a:off x="7072884" y="2197100"/>
-            <a:ext cx="532384" cy="1092200"/>
+            <a:ext cx="541020" cy="1092200"/>
           </a:xfrm>
           <a:prstGeom prst="rect">
             <a:avLst/>
@@ -3794,7 +3794,7 @@
         </p:nvSpPr>
         <p:spPr>
           <a:xfrm>
-            <a:off x="7714996" y="2197100"/>
+            <a:off x="7723632" y="2197100"/>
             <a:ext cx="563118" cy="509524"/>
           </a:xfrm>
           <a:prstGeom prst="rect">
@@ -3833,7 +3833,7 @@
         </p:nvSpPr>
         <p:spPr>
           <a:xfrm>
-            <a:off x="7751572" y="2743200"/>
+            <a:off x="7760208" y="2743200"/>
             <a:ext cx="489966" cy="0"/>
           </a:xfrm>
           <a:prstGeom prst="line">
@@ -3856,7 +3856,7 @@
         </p:nvSpPr>
         <p:spPr>
           <a:xfrm>
-            <a:off x="7714996" y="2779776"/>
+            <a:off x="7723632" y="2779776"/>
             <a:ext cx="563118" cy="509524"/>
           </a:xfrm>
           <a:prstGeom prst="rect">
@@ -3895,7 +3895,7 @@
         </p:nvSpPr>
         <p:spPr>
           <a:xfrm>
-            <a:off x="8387842" y="2197100"/>
+            <a:off x="8396478" y="2197100"/>
             <a:ext cx="437388" cy="1092200"/>
           </a:xfrm>
           <a:prstGeom prst="rect">
@@ -3934,7 +3934,7 @@
         </p:nvSpPr>
         <p:spPr>
           <a:xfrm>
-            <a:off x="9027993" y="2263338"/>
+            <a:off x="9036629" y="2263338"/>
             <a:ext cx="377048" cy="377048"/>
           </a:xfrm>
           <a:prstGeom prst="rect">
@@ -3959,7 +3959,7 @@
         </p:nvSpPr>
         <p:spPr>
           <a:xfrm>
-            <a:off x="8971534" y="2743200"/>
+            <a:off x="8980170" y="2743200"/>
             <a:ext cx="489966" cy="0"/>
           </a:xfrm>
           <a:prstGeom prst="line">
@@ -3982,7 +3982,7 @@
         </p:nvSpPr>
         <p:spPr>
           <a:xfrm>
-            <a:off x="8934958" y="2779776"/>
+            <a:off x="8943594" y="2779776"/>
             <a:ext cx="563118" cy="509524"/>
           </a:xfrm>
           <a:prstGeom prst="rect">
@@ -4968,7 +4968,7 @@
         <p:spPr>
           <a:xfrm>
             <a:off x="7072884" y="2197100"/>
-            <a:ext cx="532384" cy="1092200"/>
+            <a:ext cx="541020" cy="1092200"/>
           </a:xfrm>
           <a:prstGeom prst="rect">
             <a:avLst/>
@@ -5006,7 +5006,7 @@
         </p:nvSpPr>
         <p:spPr>
           <a:xfrm>
-            <a:off x="7714996" y="2197100"/>
+            <a:off x="7723632" y="2197100"/>
             <a:ext cx="563118" cy="509524"/>
           </a:xfrm>
           <a:prstGeom prst="rect">
@@ -5045,7 +5045,7 @@
         </p:nvSpPr>
         <p:spPr>
           <a:xfrm>
-            <a:off x="7751572" y="2743200"/>
+            <a:off x="7760208" y="2743200"/>
             <a:ext cx="489966" cy="0"/>
           </a:xfrm>
           <a:prstGeom prst="line">
@@ -5068,7 +5068,7 @@
         </p:nvSpPr>
         <p:spPr>
           <a:xfrm>
-            <a:off x="7714996" y="2779776"/>
+            <a:off x="7723632" y="2779776"/>
             <a:ext cx="563118" cy="509524"/>
           </a:xfrm>
           <a:prstGeom prst="rect">
@@ -5107,7 +5107,7 @@
         </p:nvSpPr>
         <p:spPr>
           <a:xfrm>
-            <a:off x="8387842" y="2197100"/>
+            <a:off x="8396478" y="2197100"/>
             <a:ext cx="437388" cy="1092200"/>
           </a:xfrm>
           <a:prstGeom prst="rect">
@@ -5146,7 +5146,7 @@
         </p:nvSpPr>
         <p:spPr>
           <a:xfrm>
-            <a:off x="9027993" y="2263338"/>
+            <a:off x="9036629" y="2263338"/>
             <a:ext cx="377048" cy="377048"/>
           </a:xfrm>
           <a:prstGeom prst="rect">
@@ -5171,7 +5171,7 @@
         </p:nvSpPr>
         <p:spPr>
           <a:xfrm>
-            <a:off x="8971534" y="2743200"/>
+            <a:off x="8980170" y="2743200"/>
             <a:ext cx="489966" cy="0"/>
           </a:xfrm>
           <a:prstGeom prst="line">
@@ -5194,7 +5194,7 @@
         </p:nvSpPr>
         <p:spPr>
           <a:xfrm>
-            <a:off x="8934958" y="2779776"/>
+            <a:off x="8943594" y="2779776"/>
             <a:ext cx="563118" cy="509524"/>
           </a:xfrm>
           <a:prstGeom prst="rect">
@@ -5580,7 +5580,7 @@
         <p:spPr>
           <a:xfrm>
             <a:off x="7072884" y="4391660"/>
-            <a:ext cx="532384" cy="1092200"/>
+            <a:ext cx="541020" cy="1092200"/>
           </a:xfrm>
           <a:prstGeom prst="rect">
             <a:avLst/>
@@ -5618,7 +5618,7 @@
         </p:nvSpPr>
         <p:spPr>
           <a:xfrm>
-            <a:off x="7714996" y="4391660"/>
+            <a:off x="7723632" y="4391660"/>
             <a:ext cx="563118" cy="509524"/>
           </a:xfrm>
           <a:prstGeom prst="rect">
@@ -5657,7 +5657,7 @@
         </p:nvSpPr>
         <p:spPr>
           <a:xfrm>
-            <a:off x="7751572" y="4937760"/>
+            <a:off x="7760208" y="4937760"/>
             <a:ext cx="489966" cy="0"/>
           </a:xfrm>
           <a:prstGeom prst="line">
@@ -5680,7 +5680,7 @@
         </p:nvSpPr>
         <p:spPr>
           <a:xfrm>
-            <a:off x="7714996" y="4974336"/>
+            <a:off x="7723632" y="4974336"/>
             <a:ext cx="563118" cy="509524"/>
           </a:xfrm>
           <a:prstGeom prst="rect">
@@ -5719,7 +5719,7 @@
         </p:nvSpPr>
         <p:spPr>
           <a:xfrm>
-            <a:off x="8387842" y="4391660"/>
+            <a:off x="8396478" y="4391660"/>
             <a:ext cx="437388" cy="1092200"/>
           </a:xfrm>
           <a:prstGeom prst="rect">
@@ -5758,7 +5758,7 @@
         </p:nvSpPr>
         <p:spPr>
           <a:xfrm>
-            <a:off x="9027993" y="4457898"/>
+            <a:off x="9036629" y="4457898"/>
             <a:ext cx="377048" cy="377048"/>
           </a:xfrm>
           <a:prstGeom prst="rect">
@@ -5783,7 +5783,7 @@
         </p:nvSpPr>
         <p:spPr>
           <a:xfrm>
-            <a:off x="8971534" y="4937760"/>
+            <a:off x="8980170" y="4937760"/>
             <a:ext cx="489966" cy="0"/>
           </a:xfrm>
           <a:prstGeom prst="line">
@@ -5806,7 +5806,7 @@
         </p:nvSpPr>
         <p:spPr>
           <a:xfrm>
-            <a:off x="8934958" y="4974336"/>
+            <a:off x="8943594" y="4974336"/>
             <a:ext cx="563118" cy="509524"/>
           </a:xfrm>
           <a:prstGeom prst="rect">
@@ -7022,7 +7022,7 @@
         <p:spPr>
           <a:xfrm>
             <a:off x="5036312" y="4402328"/>
-            <a:ext cx="483616" cy="912368"/>
+            <a:ext cx="490728" cy="912368"/>
           </a:xfrm>
           <a:prstGeom prst="rect">
             <a:avLst/>
@@ -7060,7 +7060,7 @@
         </p:nvSpPr>
         <p:spPr>
           <a:xfrm>
-            <a:off x="5629656" y="4402328"/>
+            <a:off x="5636768" y="4402328"/>
             <a:ext cx="483108" cy="419608"/>
           </a:xfrm>
           <a:prstGeom prst="rect">
@@ -7099,7 +7099,7 @@
         </p:nvSpPr>
         <p:spPr>
           <a:xfrm>
-            <a:off x="5666232" y="4858512"/>
+            <a:off x="5673344" y="4858512"/>
             <a:ext cx="409956" cy="0"/>
           </a:xfrm>
           <a:prstGeom prst="line">
@@ -7122,7 +7122,7 @@
         </p:nvSpPr>
         <p:spPr>
           <a:xfrm>
-            <a:off x="5629656" y="4895088"/>
+            <a:off x="5636768" y="4895088"/>
             <a:ext cx="483108" cy="419608"/>
           </a:xfrm>
           <a:prstGeom prst="rect">
@@ -7161,7 +7161,7 @@
         </p:nvSpPr>
         <p:spPr>
           <a:xfrm>
-            <a:off x="6222492" y="4402328"/>
+            <a:off x="6229604" y="4402328"/>
             <a:ext cx="405384" cy="912368"/>
           </a:xfrm>
           <a:prstGeom prst="rect">
@@ -7200,7 +7200,7 @@
         </p:nvSpPr>
         <p:spPr>
           <a:xfrm>
-            <a:off x="6823903" y="4456877"/>
+            <a:off x="6831015" y="4456877"/>
             <a:ext cx="310510" cy="310510"/>
           </a:xfrm>
           <a:prstGeom prst="rect">
@@ -7225,7 +7225,7 @@
         </p:nvSpPr>
         <p:spPr>
           <a:xfrm>
-            <a:off x="6774180" y="4858512"/>
+            <a:off x="6781292" y="4858512"/>
             <a:ext cx="409956" cy="0"/>
           </a:xfrm>
           <a:prstGeom prst="line">
@@ -7248,7 +7248,7 @@
         </p:nvSpPr>
         <p:spPr>
           <a:xfrm>
-            <a:off x="6737604" y="4895088"/>
+            <a:off x="6744716" y="4895088"/>
             <a:ext cx="483108" cy="419608"/>
           </a:xfrm>
           <a:prstGeom prst="rect">
@@ -8907,7 +8907,7 @@
         <p:spPr>
           <a:xfrm>
             <a:off x="1344168" y="5031740"/>
-            <a:ext cx="1231900" cy="1092200"/>
+            <a:ext cx="1249172" cy="1092200"/>
           </a:xfrm>
           <a:prstGeom prst="rect">
             <a:avLst/>
@@ -8945,7 +8945,7 @@
         </p:nvSpPr>
         <p:spPr>
           <a:xfrm>
-            <a:off x="2685796" y="5031740"/>
+            <a:off x="2703068" y="5031740"/>
             <a:ext cx="563118" cy="509524"/>
           </a:xfrm>
           <a:prstGeom prst="rect">
@@ -8984,7 +8984,7 @@
         </p:nvSpPr>
         <p:spPr>
           <a:xfrm>
-            <a:off x="2722372" y="5577840"/>
+            <a:off x="2739644" y="5577840"/>
             <a:ext cx="489966" cy="0"/>
           </a:xfrm>
           <a:prstGeom prst="line">
@@ -9007,7 +9007,7 @@
         </p:nvSpPr>
         <p:spPr>
           <a:xfrm>
-            <a:off x="2685796" y="5614416"/>
+            <a:off x="2703068" y="5614416"/>
             <a:ext cx="563118" cy="509524"/>
           </a:xfrm>
           <a:prstGeom prst="rect">
@@ -9046,7 +9046,7 @@
         </p:nvSpPr>
         <p:spPr>
           <a:xfrm>
-            <a:off x="3358642" y="5031740"/>
+            <a:off x="3375914" y="5031740"/>
             <a:ext cx="437388" cy="1092200"/>
           </a:xfrm>
           <a:prstGeom prst="rect">
@@ -9085,7 +9085,7 @@
         </p:nvSpPr>
         <p:spPr>
           <a:xfrm>
-            <a:off x="4056832" y="5389316"/>
+            <a:off x="4074104" y="5389316"/>
             <a:ext cx="377048" cy="377048"/>
           </a:xfrm>
           <a:prstGeom prst="rect">
@@ -9330,7 +9330,7 @@
               <a:buNone/>
             </a:pPr>
             <a:r>
-              <a:rPr lang="ko-KR" altLang="en-US" sz="2400" dirty="0">
+              <a:rPr lang="en-US" altLang="ko-KR" sz="2400" dirty="0">
                 <a:solidFill>
                   <a:srgbClr val="1F2937"/>
                 </a:solidFill>
@@ -11940,8 +11940,8 @@
         </p:nvSpPr>
         <p:spPr>
           <a:xfrm>
-            <a:off x="9274302" y="2012442"/>
-            <a:ext cx="548640" cy="1152144"/>
+            <a:off x="9269730" y="2012442"/>
+            <a:ext cx="557784" cy="1152144"/>
           </a:xfrm>
           <a:prstGeom prst="rect">
             <a:avLst/>
@@ -11979,7 +11979,7 @@
         </p:nvSpPr>
         <p:spPr>
           <a:xfrm>
-            <a:off x="9932670" y="2012442"/>
+            <a:off x="9937242" y="2012442"/>
             <a:ext cx="589788" cy="539496"/>
           </a:xfrm>
           <a:prstGeom prst="rect">
@@ -12018,7 +12018,7 @@
         </p:nvSpPr>
         <p:spPr>
           <a:xfrm>
-            <a:off x="9969246" y="2588514"/>
+            <a:off x="9973818" y="2588514"/>
             <a:ext cx="516636" cy="0"/>
           </a:xfrm>
           <a:prstGeom prst="line">
@@ -12041,7 +12041,7 @@
         </p:nvSpPr>
         <p:spPr>
           <a:xfrm>
-            <a:off x="9932670" y="2625090"/>
+            <a:off x="9937242" y="2625090"/>
             <a:ext cx="589788" cy="539496"/>
           </a:xfrm>
           <a:prstGeom prst="rect">
@@ -12685,7 +12685,7 @@
         <p:spPr>
           <a:xfrm>
             <a:off x="1344168" y="3109976"/>
-            <a:ext cx="483616" cy="912368"/>
+            <a:ext cx="490728" cy="912368"/>
           </a:xfrm>
           <a:prstGeom prst="rect">
             <a:avLst/>
@@ -12723,7 +12723,7 @@
         </p:nvSpPr>
         <p:spPr>
           <a:xfrm>
-            <a:off x="1937512" y="3109976"/>
+            <a:off x="1944624" y="3109976"/>
             <a:ext cx="483108" cy="419608"/>
           </a:xfrm>
           <a:prstGeom prst="rect">
@@ -12762,7 +12762,7 @@
         </p:nvSpPr>
         <p:spPr>
           <a:xfrm>
-            <a:off x="1974088" y="3566160"/>
+            <a:off x="1981200" y="3566160"/>
             <a:ext cx="409956" cy="0"/>
           </a:xfrm>
           <a:prstGeom prst="line">
@@ -12785,7 +12785,7 @@
         </p:nvSpPr>
         <p:spPr>
           <a:xfrm>
-            <a:off x="1937512" y="3602736"/>
+            <a:off x="1944624" y="3602736"/>
             <a:ext cx="483108" cy="419608"/>
           </a:xfrm>
           <a:prstGeom prst="rect">
@@ -13020,7 +13020,7 @@
         <p:spPr>
           <a:xfrm>
             <a:off x="1344168" y="4207256"/>
-            <a:ext cx="483616" cy="912368"/>
+            <a:ext cx="490728" cy="912368"/>
           </a:xfrm>
           <a:prstGeom prst="rect">
             <a:avLst/>
@@ -13058,7 +13058,7 @@
         </p:nvSpPr>
         <p:spPr>
           <a:xfrm>
-            <a:off x="1937512" y="4207256"/>
+            <a:off x="1944624" y="4207256"/>
             <a:ext cx="483108" cy="419608"/>
           </a:xfrm>
           <a:prstGeom prst="rect">
@@ -13097,7 +13097,7 @@
         </p:nvSpPr>
         <p:spPr>
           <a:xfrm>
-            <a:off x="1974088" y="4663440"/>
+            <a:off x="1981200" y="4663440"/>
             <a:ext cx="409956" cy="0"/>
           </a:xfrm>
           <a:prstGeom prst="line">
@@ -13120,7 +13120,7 @@
         </p:nvSpPr>
         <p:spPr>
           <a:xfrm>
-            <a:off x="1937512" y="4700016"/>
+            <a:off x="1944624" y="4700016"/>
             <a:ext cx="483108" cy="419608"/>
           </a:xfrm>
           <a:prstGeom prst="rect">
@@ -14253,7 +14253,7 @@
         <p:spPr>
           <a:xfrm>
             <a:off x="548640" y="1351280"/>
-            <a:ext cx="532384" cy="1092200"/>
+            <a:ext cx="541020" cy="1092200"/>
           </a:xfrm>
           <a:prstGeom prst="rect">
             <a:avLst/>
@@ -14291,7 +14291,7 @@
         </p:nvSpPr>
         <p:spPr>
           <a:xfrm>
-            <a:off x="1190752" y="1351280"/>
+            <a:off x="1199388" y="1351280"/>
             <a:ext cx="563118" cy="509524"/>
           </a:xfrm>
           <a:prstGeom prst="rect">
@@ -14330,7 +14330,7 @@
         </p:nvSpPr>
         <p:spPr>
           <a:xfrm>
-            <a:off x="1227328" y="1897380"/>
+            <a:off x="1235964" y="1897380"/>
             <a:ext cx="489966" cy="0"/>
           </a:xfrm>
           <a:prstGeom prst="line">
@@ -14353,7 +14353,7 @@
         </p:nvSpPr>
         <p:spPr>
           <a:xfrm>
-            <a:off x="1190752" y="1933956"/>
+            <a:off x="1199388" y="1933956"/>
             <a:ext cx="563118" cy="509524"/>
           </a:xfrm>
           <a:prstGeom prst="rect">
@@ -14392,7 +14392,7 @@
         </p:nvSpPr>
         <p:spPr>
           <a:xfrm>
-            <a:off x="1863598" y="1351280"/>
+            <a:off x="1872234" y="1351280"/>
             <a:ext cx="437388" cy="1092200"/>
           </a:xfrm>
           <a:prstGeom prst="rect">
@@ -14431,7 +14431,7 @@
         </p:nvSpPr>
         <p:spPr>
           <a:xfrm>
-            <a:off x="2503749" y="1417518"/>
+            <a:off x="2512385" y="1417518"/>
             <a:ext cx="377048" cy="377048"/>
           </a:xfrm>
           <a:prstGeom prst="rect">
@@ -14456,7 +14456,7 @@
         </p:nvSpPr>
         <p:spPr>
           <a:xfrm>
-            <a:off x="2447290" y="1897380"/>
+            <a:off x="2455926" y="1897380"/>
             <a:ext cx="489966" cy="0"/>
           </a:xfrm>
           <a:prstGeom prst="line">
@@ -14479,7 +14479,7 @@
         </p:nvSpPr>
         <p:spPr>
           <a:xfrm>
-            <a:off x="2410714" y="1933956"/>
+            <a:off x="2419350" y="1933956"/>
             <a:ext cx="563118" cy="509524"/>
           </a:xfrm>
           <a:prstGeom prst="rect">

--- a/dist/초3/수학/분수와소수/초3_수학_분수와소수_05_진분수·가분수·대분수_학생용.pptx
+++ b/dist/초3/수학/분수와소수/초3_수학_분수와소수_05_진분수·가분수·대분수_학생용.pptx
@@ -120,13 +120,13 @@
   <p:extLst>
     <p:ext uri="{521415D9-36F7-43E2-AB2F-B90AF26B5E84}">
       <p14:sectionLst xmlns:p14="http://schemas.microsoft.com/office/powerpoint/2010/main">
-        <p14:section name="도입" id="{3a60e9fb-e91b-61b8-c439-25c31ded8722}">
+        <p14:section name="도입" id="{da4c18fd-1386-2d80-888c-1bc9a6b0bce8}">
           <p14:sldIdLst>
             <p14:sldId id="256"/>
             <p14:sldId id="257"/>
           </p14:sldIdLst>
         </p14:section>
-        <p14:section name="개념" id="{d428b192-669d-41ce-eb4f-018fcef53bff}">
+        <p14:section name="개념" id="{02b073e1-494d-dcf0-5c61-b92e778f6396}">
           <p14:sldIdLst>
             <p14:sldId id="258"/>
             <p14:sldId id="259"/>
@@ -135,31 +135,31 @@
             <p14:sldId id="264"/>
           </p14:sldIdLst>
         </p14:section>
-        <p14:section name="연습" id="{4c5b49c0-1efb-1461-563c-7abdf365ecc3}">
+        <p14:section name="연습" id="{8adfc7f7-2a78-5292-562a-68603d0c7d3d}">
           <p14:sldIdLst>
             <p14:sldId id="261"/>
             <p14:sldId id="262"/>
             <p14:sldId id="265"/>
           </p14:sldIdLst>
         </p14:section>
-        <p14:section name="개념" id="{ab0944d3-d972-791d-dcbf-4e3b457d7cb0}">
+        <p14:section name="개념" id="{b4a64171-6118-d8c0-6fcc-879918941132}">
           <p14:sldIdLst/>
         </p14:section>
-        <p14:section name="연습" id="{af5d33dc-aac0-2312-5dcc-2897a4449a81}">
+        <p14:section name="연습" id="{5b9aae67-f677-baeb-724c-940dc1c92b59}">
           <p14:sldIdLst/>
         </p14:section>
-        <p14:section name="확인" id="{5f6ca6dd-4277-15db-8419-bd1e9e2dea93}">
+        <p14:section name="확인" id="{fee80f18-b0f0-3687-c914-ecddc20664c3}">
           <p14:sldIdLst>
             <p14:sldId id="266"/>
             <p14:sldId id="267"/>
           </p14:sldIdLst>
         </p14:section>
-        <p14:section name="정리" id="{ed771799-f3ed-f6cd-0e55-3c9d2a39a72c}">
+        <p14:section name="정리" id="{36071935-4f8f-47cb-ebb6-8e3a9c1b67ce}">
           <p14:sldIdLst>
             <p14:sldId id="268"/>
           </p14:sldIdLst>
         </p14:section>
-        <p14:section name="보충" id="{51dcf9b4-ada7-46ef-e53f-a6e8169a3fc2}">
+        <p14:section name="보충" id="{003ee874-5824-f004-5555-eee2385e9d0b}">
           <p14:sldIdLst>
             <p14:sldId id="269"/>
           </p14:sldIdLst>
